--- a/planering/biologi-omrade3/biologi-3-2-gruppera-och-organismvarlden.pptx
+++ b/planering/biologi-omrade3/biologi-3-2-gruppera-och-organismvarlden.pptx
@@ -119,12 +119,12 @@
   <p:extLst>
     <p:ext uri="{521415D9-36F7-43E2-AB2F-B90AF26B5E84}">
       <p14:sectionLst xmlns:p14="http://schemas.microsoft.com/office/powerpoint/2010/main">
-        <p14:section name="Start" id="{3eebb1e3-bfa2-dc51-5491-94486075c2e4}">
+        <p14:section name="Start" id="{c9443856-4747-bf19-605e-90a544be15b0}">
           <p14:sldIdLst>
             <p14:sldId id="256"/>
           </p14:sldIdLst>
         </p14:section>
-        <p14:section name="Rikena" id="{6fec9a50-30af-0ed7-18b5-5eafcb63375f}">
+        <p14:section name="Rikena" id="{02c7fcd4-6d40-1632-f87d-d747cf89109f}">
           <p14:sldIdLst>
             <p14:sldId id="257"/>
             <p14:sldId id="258"/>
@@ -132,21 +132,21 @@
             <p14:sldId id="260"/>
           </p14:sldIdLst>
         </p14:section>
-        <p14:section name="Bestämningsnycklar" id="{50a05109-9dad-3601-7570-8abb025b1e62}">
+        <p14:section name="Bestämningsnycklar" id="{e6239a88-d4a5-39cc-caa4-073c56a25152}">
           <p14:sldIdLst>
             <p14:sldId id="261"/>
             <p14:sldId id="262"/>
             <p14:sldId id="263"/>
           </p14:sldIdLst>
         </p14:section>
-        <p14:section name="Anpassningar" id="{a0635811-1982-ab6e-bf96-8670f6f71d15}">
+        <p14:section name="Anpassningar" id="{55b95f65-243b-ec50-a1be-d87d37fd8108}">
           <p14:sldIdLst>
             <p14:sldId id="264"/>
             <p14:sldId id="265"/>
             <p14:sldId id="266"/>
           </p14:sldIdLst>
         </p14:section>
-        <p14:section name="Labb 3.2 Artbestämning med nyckel" id="{b86a1945-813e-6092-378b-07647e937d48}">
+        <p14:section name="Labb 3.2 Artbestämning med nyckel" id="{136cd2f8-e6f3-7cfd-c424-729fab2a4938}">
           <p14:sldIdLst>
             <p14:sldId id="267"/>
             <p14:sldId id="268"/>
@@ -2536,7 +2536,7 @@
         <p:spPr>
           <a:xfrm>
             <a:off x="548640" y="1554480"/>
-            <a:ext cx="4782312" cy="4480560"/>
+            <a:ext cx="3593592" cy="4480560"/>
           </a:xfrm>
           <a:prstGeom prst="rect">
             <a:avLst/>
@@ -2556,14 +2556,14 @@
               <a:buChar char="•"/>
             </a:pPr>
             <a:r>
-              <a:rPr lang="en-US" sz="2200" dirty="0">
+              <a:rPr lang="en-US" sz="2000" dirty="0">
                 <a:solidFill>
                   <a:schemeClr val="tx1"/>
                 </a:solidFill>
               </a:rPr>
               <a:t>Variation: individer är olika.</a:t>
             </a:r>
-            <a:endParaRPr lang="en-US" sz="2200" dirty="0"/>
+            <a:endParaRPr lang="en-US" sz="2000" dirty="0"/>
           </a:p>
           <a:p>
             <a:pPr marL="342900" indent="-342900">
@@ -2574,14 +2574,14 @@
               <a:buChar char="•"/>
             </a:pPr>
             <a:r>
-              <a:rPr lang="en-US" sz="2200" dirty="0">
+              <a:rPr lang="en-US" sz="2000" dirty="0">
                 <a:solidFill>
                   <a:schemeClr val="tx1"/>
                 </a:solidFill>
               </a:rPr>
               <a:t>Urval: de som passar bäst överlever.</a:t>
             </a:r>
-            <a:endParaRPr lang="en-US" sz="2200" dirty="0"/>
+            <a:endParaRPr lang="en-US" sz="2000" dirty="0"/>
           </a:p>
           <a:p>
             <a:pPr marL="342900" indent="-342900">
@@ -2592,14 +2592,14 @@
               <a:buChar char="•"/>
             </a:pPr>
             <a:r>
-              <a:rPr lang="en-US" sz="2200" dirty="0">
+              <a:rPr lang="en-US" sz="2000" dirty="0">
                 <a:solidFill>
                   <a:schemeClr val="tx1"/>
                 </a:solidFill>
               </a:rPr>
               <a:t>Ärftlighet: draget går i arv.</a:t>
             </a:r>
-            <a:endParaRPr lang="en-US" sz="2200" dirty="0"/>
+            <a:endParaRPr lang="en-US" sz="2000" dirty="0"/>
           </a:p>
           <a:p>
             <a:pPr marL="342900" indent="-342900">
@@ -2610,14 +2610,14 @@
               <a:buChar char="•"/>
             </a:pPr>
             <a:r>
-              <a:rPr lang="en-US" sz="2200" dirty="0">
+              <a:rPr lang="en-US" sz="2000" dirty="0">
                 <a:solidFill>
                   <a:schemeClr val="tx1"/>
                 </a:solidFill>
               </a:rPr>
               <a:t>Draget blir vanligare.</a:t>
             </a:r>
-            <a:endParaRPr lang="en-US" sz="2200" dirty="0"/>
+            <a:endParaRPr lang="en-US" sz="2000" dirty="0"/>
           </a:p>
         </p:txBody>
       </p:sp>
@@ -2637,8 +2637,8 @@
         </p:blipFill>
         <p:spPr>
           <a:xfrm>
-            <a:off x="5788152" y="2702357"/>
-            <a:ext cx="5852160" cy="2184806"/>
+            <a:off x="4599432" y="2480462"/>
+            <a:ext cx="7040880" cy="2628595"/>
           </a:xfrm>
           <a:prstGeom prst="rect">
             <a:avLst/>
@@ -3807,7 +3807,7 @@
         <p:spPr>
           <a:xfrm>
             <a:off x="548640" y="1554480"/>
-            <a:ext cx="4782312" cy="4480560"/>
+            <a:ext cx="3593592" cy="4480560"/>
           </a:xfrm>
           <a:prstGeom prst="rect">
             <a:avLst/>
@@ -3827,14 +3827,14 @@
               <a:buChar char="•"/>
             </a:pPr>
             <a:r>
-              <a:rPr lang="en-US" sz="2200" dirty="0">
+              <a:rPr lang="en-US" sz="2000" dirty="0">
                 <a:solidFill>
                   <a:schemeClr val="tx1"/>
                 </a:solidFill>
               </a:rPr>
               <a:t>Djur, växter, svampar, bakterier.</a:t>
             </a:r>
-            <a:endParaRPr lang="en-US" sz="2200" dirty="0"/>
+            <a:endParaRPr lang="en-US" sz="2000" dirty="0"/>
           </a:p>
           <a:p>
             <a:pPr marL="342900" indent="-342900">
@@ -3845,14 +3845,14 @@
               <a:buChar char="•"/>
             </a:pPr>
             <a:r>
-              <a:rPr lang="en-US" sz="2200" dirty="0">
+              <a:rPr lang="en-US" sz="2000" dirty="0">
                 <a:solidFill>
                   <a:schemeClr val="tx1"/>
                 </a:solidFill>
               </a:rPr>
               <a:t>Encelliga organismer med cellkärna.</a:t>
             </a:r>
-            <a:endParaRPr lang="en-US" sz="2200" dirty="0"/>
+            <a:endParaRPr lang="en-US" sz="2000" dirty="0"/>
           </a:p>
           <a:p>
             <a:pPr marL="342900" indent="-342900">
@@ -3863,14 +3863,14 @@
               <a:buChar char="•"/>
             </a:pPr>
             <a:r>
-              <a:rPr lang="en-US" sz="2200" dirty="0">
+              <a:rPr lang="en-US" sz="2000" dirty="0">
                 <a:solidFill>
                   <a:schemeClr val="tx1"/>
                 </a:solidFill>
               </a:rPr>
               <a:t>Svampar gör ingen fotosyntes.</a:t>
             </a:r>
-            <a:endParaRPr lang="en-US" sz="2200" dirty="0"/>
+            <a:endParaRPr lang="en-US" sz="2000" dirty="0"/>
           </a:p>
           <a:p>
             <a:pPr marL="342900" indent="-342900">
@@ -3881,14 +3881,14 @@
               <a:buChar char="•"/>
             </a:pPr>
             <a:r>
-              <a:rPr lang="en-US" sz="2200" dirty="0">
+              <a:rPr lang="en-US" sz="2000" dirty="0">
                 <a:solidFill>
                   <a:schemeClr val="tx1"/>
                 </a:solidFill>
               </a:rPr>
               <a:t>Lav: svamp + alg i symbios.</a:t>
             </a:r>
-            <a:endParaRPr lang="en-US" sz="2200" dirty="0"/>
+            <a:endParaRPr lang="en-US" sz="2000" dirty="0"/>
           </a:p>
         </p:txBody>
       </p:sp>
@@ -3908,8 +3908,8 @@
         </p:blipFill>
         <p:spPr>
           <a:xfrm>
-            <a:off x="5788152" y="2702357"/>
-            <a:ext cx="5852160" cy="2184806"/>
+            <a:off x="4599432" y="2480462"/>
+            <a:ext cx="7040880" cy="2628595"/>
           </a:xfrm>
           <a:prstGeom prst="rect">
             <a:avLst/>
@@ -5027,7 +5027,7 @@
         <p:spPr>
           <a:xfrm>
             <a:off x="548640" y="1554480"/>
-            <a:ext cx="4782312" cy="4480560"/>
+            <a:ext cx="3593592" cy="4480560"/>
           </a:xfrm>
           <a:prstGeom prst="rect">
             <a:avLst/>
@@ -5047,14 +5047,14 @@
               <a:buChar char="•"/>
             </a:pPr>
             <a:r>
-              <a:rPr lang="en-US" sz="2200" dirty="0">
+              <a:rPr lang="en-US" sz="2000" dirty="0">
                 <a:solidFill>
                   <a:schemeClr val="tx1"/>
                 </a:solidFill>
               </a:rPr>
               <a:t>Två alternativ i varje steg.</a:t>
             </a:r>
-            <a:endParaRPr lang="en-US" sz="2200" dirty="0"/>
+            <a:endParaRPr lang="en-US" sz="2000" dirty="0"/>
           </a:p>
           <a:p>
             <a:pPr marL="342900" indent="-342900">
@@ -5065,14 +5065,14 @@
               <a:buChar char="•"/>
             </a:pPr>
             <a:r>
-              <a:rPr lang="en-US" sz="2200" dirty="0">
+              <a:rPr lang="en-US" sz="2000" dirty="0">
                 <a:solidFill>
                   <a:schemeClr val="tx1"/>
                 </a:solidFill>
               </a:rPr>
               <a:t>Jämför kännetecken, inte känsla.</a:t>
             </a:r>
-            <a:endParaRPr lang="en-US" sz="2200" dirty="0"/>
+            <a:endParaRPr lang="en-US" sz="2000" dirty="0"/>
           </a:p>
           <a:p>
             <a:pPr marL="342900" indent="-342900">
@@ -5083,14 +5083,14 @@
               <a:buChar char="•"/>
             </a:pPr>
             <a:r>
-              <a:rPr lang="en-US" sz="2200" dirty="0">
+              <a:rPr lang="en-US" sz="2000" dirty="0">
                 <a:solidFill>
                   <a:schemeClr val="tx1"/>
                 </a:solidFill>
               </a:rPr>
               <a:t>Följ valen tills du får ett namn.</a:t>
             </a:r>
-            <a:endParaRPr lang="en-US" sz="2200" dirty="0"/>
+            <a:endParaRPr lang="en-US" sz="2000" dirty="0"/>
           </a:p>
           <a:p>
             <a:pPr marL="342900" indent="-342900">
@@ -5101,14 +5101,14 @@
               <a:buChar char="•"/>
             </a:pPr>
             <a:r>
-              <a:rPr lang="en-US" sz="2200" dirty="0">
+              <a:rPr lang="en-US" sz="2000" dirty="0">
                 <a:solidFill>
                   <a:schemeClr val="tx1"/>
                 </a:solidFill>
               </a:rPr>
               <a:t>Kontrollera i bok eller app.</a:t>
             </a:r>
-            <a:endParaRPr lang="en-US" sz="2200" dirty="0"/>
+            <a:endParaRPr lang="en-US" sz="2000" dirty="0"/>
           </a:p>
         </p:txBody>
       </p:sp>
@@ -5128,8 +5128,8 @@
         </p:blipFill>
         <p:spPr>
           <a:xfrm>
-            <a:off x="5788152" y="2404872"/>
-            <a:ext cx="5852160" cy="2779776"/>
+            <a:off x="4599432" y="2220916"/>
+            <a:ext cx="7040880" cy="3147688"/>
           </a:xfrm>
           <a:prstGeom prst="rect">
             <a:avLst/>
